--- a/docs/video-scripts/slides/pptx/module-8/lesson-8-2-code.pptx
+++ b/docs/video-scripts/slides/pptx/module-8/lesson-8-2-code.pptx
@@ -3170,7 +3170,7 @@
               </a:lnSpc>
             </a:pPr>
             <a:r>
-              <a:rPr sz="1400" b="1">
+              <a:rPr sz="1400" b="1" i="0">
                 <a:solidFill>
                   <a:srgbClr val="2B6E2B"/>
                 </a:solidFill>
@@ -3209,7 +3209,7 @@
               </a:lnSpc>
             </a:pPr>
             <a:r>
-              <a:rPr sz="5400" b="1">
+              <a:rPr sz="5400" b="1" i="0">
                 <a:solidFill>
                   <a:srgbClr val="030303"/>
                 </a:solidFill>
@@ -3248,7 +3248,7 @@
               </a:lnSpc>
             </a:pPr>
             <a:r>
-              <a:rPr sz="2200" b="0">
+              <a:rPr sz="2200" b="0" i="0">
                 <a:solidFill>
                   <a:srgbClr val="272525"/>
                 </a:solidFill>
@@ -3287,7 +3287,7 @@
               </a:lnSpc>
             </a:pPr>
             <a:r>
-              <a:rPr sz="1100" b="1">
+              <a:rPr sz="1100" b="1" i="0">
                 <a:solidFill>
                   <a:srgbClr val="2B6E2B"/>
                 </a:solidFill>
@@ -3352,7 +3352,7 @@
               </a:lnSpc>
             </a:pPr>
             <a:r>
-              <a:rPr sz="1200" b="1">
+              <a:rPr sz="1200" b="1" i="0">
                 <a:solidFill>
                   <a:srgbClr val="2B6E2B"/>
                 </a:solidFill>
@@ -3391,7 +3391,7 @@
               </a:lnSpc>
             </a:pPr>
             <a:r>
-              <a:rPr sz="4200" b="1">
+              <a:rPr sz="4200" b="1" i="0">
                 <a:solidFill>
                   <a:srgbClr val="030303"/>
                 </a:solidFill>
@@ -3474,7 +3474,7 @@
               </a:lnSpc>
             </a:pPr>
             <a:r>
-              <a:rPr sz="2200" b="0">
+              <a:rPr sz="2200" b="0" i="0">
                 <a:solidFill>
                   <a:srgbClr val="272525"/>
                 </a:solidFill>
@@ -3490,7 +3490,7 @@
               </a:lnSpc>
             </a:pPr>
             <a:r>
-              <a:rPr sz="2200" b="0">
+              <a:rPr sz="2200" b="0" i="0">
                 <a:solidFill>
                   <a:srgbClr val="272525"/>
                 </a:solidFill>
@@ -3506,7 +3506,7 @@
               </a:lnSpc>
             </a:pPr>
             <a:r>
-              <a:rPr sz="2200" b="0">
+              <a:rPr sz="2200" b="0" i="0">
                 <a:solidFill>
                   <a:srgbClr val="272525"/>
                 </a:solidFill>
@@ -3571,7 +3571,7 @@
               </a:lnSpc>
             </a:pPr>
             <a:r>
-              <a:rPr sz="1200" b="1">
+              <a:rPr sz="1200" b="1" i="0">
                 <a:solidFill>
                   <a:srgbClr val="2B6E2B"/>
                 </a:solidFill>
@@ -3610,7 +3610,7 @@
               </a:lnSpc>
             </a:pPr>
             <a:r>
-              <a:rPr sz="4200" b="1">
+              <a:rPr sz="4200" b="1" i="0">
                 <a:solidFill>
                   <a:srgbClr val="030303"/>
                 </a:solidFill>
@@ -3737,7 +3737,7 @@
               </a:lnSpc>
             </a:pPr>
             <a:r>
-              <a:rPr sz="2600" b="1">
+              <a:rPr sz="2600" b="1" i="0">
                 <a:solidFill>
                   <a:srgbClr val="030303"/>
                 </a:solidFill>
@@ -3753,7 +3753,7 @@
               </a:lnSpc>
             </a:pPr>
             <a:r>
-              <a:rPr sz="2600" b="1">
+              <a:rPr sz="2600" b="1" i="0">
                 <a:solidFill>
                   <a:srgbClr val="030303"/>
                 </a:solidFill>
